--- a/poster_ASPAI2026.pptx
+++ b/poster_ASPAI2026.pptx
@@ -6480,7 +6480,7 @@
           <a:p>
             <a:r>
               <a:rPr sz="1800"/>
-              <a:t>Department of Information System, Universitas of Jember, Indonesia &amp; Pukyong National University, Busan, South Korea</a:t>
+              <a:t>Department of Information Systems, Universitas of Jember, Indonesia &amp; Pukyong National University, South Korea</a:t>
             </a:r>
           </a:p>
         </p:txBody>
